--- a/docs/fly-the-upgrade-slides.pptx
+++ b/docs/fly-the-upgrade-slides.pptx
@@ -54974,7 +54974,7 @@
         <p:spPr>
           <a:xfrm>
             <a:off x="566928" y="1975104"/>
-            <a:ext cx="38100" cy="2176272"/>
+            <a:ext cx="38100" cy="2020824"/>
           </a:xfrm>
           <a:prstGeom prst="rect">
             <a:avLst/>
@@ -55018,7 +55018,7 @@
         <p:spPr>
           <a:xfrm>
             <a:off x="603504" y="1975104"/>
-            <a:ext cx="11021263" cy="2176272"/>
+            <a:ext cx="11021263" cy="2020824"/>
           </a:xfrm>
           <a:prstGeom prst="rect">
             <a:avLst/>
@@ -55064,7 +55064,7 @@
         <p:spPr>
           <a:xfrm>
             <a:off x="749808" y="2084832"/>
-            <a:ext cx="10728655" cy="1956816"/>
+            <a:ext cx="10728655" cy="1801368"/>
           </a:xfrm>
           <a:prstGeom prst="rect">
             <a:avLst/>
@@ -55089,7 +55089,7 @@
                 </a:solidFill>
                 <a:latin typeface="IBM Plex Mono"/>
               </a:rPr>
-              <a:t># What is waiting, and what already ran?</a:t>
+              <a:t># Schema first: creates and alters, never drops</a:t>
             </a:r>
           </a:p>
           <a:p>
@@ -55108,7 +55108,7 @@
                 </a:solidFill>
                 <a:latin typeface="IBM Plex Mono"/>
               </a:rPr>
-              <a:t>./vendor/bin/typo3 upgrade:list</a:t>
+              <a:t>./vendor/bin/typo3 extension:setup</a:t>
             </a:r>
           </a:p>
           <a:p>
@@ -55127,7 +55127,7 @@
                 </a:solidFill>
                 <a:latin typeface="IBM Plex Mono"/>
               </a:rPr>
-              <a:t>./vendor/bin/typo3 upgrade:list --all</a:t>
+              <a:t>./vendor/bin/typo3 cache:flush</a:t>
             </a:r>
           </a:p>
           <a:p>
@@ -55165,7 +55165,7 @@
                 </a:solidFill>
                 <a:latin typeface="IBM Plex Mono"/>
               </a:rPr>
-              <a:t># Run one, or run them all - scriptable, repeatable, reviewable</a:t>
+              <a:t># What is waiting, and what already ran?</a:t>
             </a:r>
           </a:p>
           <a:p>
@@ -55184,7 +55184,7 @@
                 </a:solidFill>
                 <a:latin typeface="IBM Plex Mono"/>
               </a:rPr>
-              <a:t>./vendor/bin/typo3 upgrade:run pagesRecyclerDoktypeMigration</a:t>
+              <a:t>./vendor/bin/typo3 upgrade:list</a:t>
             </a:r>
           </a:p>
           <a:p>
@@ -55203,7 +55203,7 @@
                 </a:solidFill>
                 <a:latin typeface="IBM Plex Mono"/>
               </a:rPr>
-              <a:t>./vendor/bin/typo3 upgrade:run</a:t>
+              <a:t>./vendor/bin/typo3 upgrade:list --all</a:t>
             </a:r>
           </a:p>
           <a:p>
@@ -55241,7 +55241,7 @@
                 </a:solidFill>
                 <a:latin typeface="IBM Plex Mono"/>
               </a:rPr>
-              <a:t># Schema and extension state</a:t>
+              <a:t># Run one, or run them all - scriptable, repeatable, reviewable</a:t>
             </a:r>
           </a:p>
           <a:p>
@@ -55260,7 +55260,7 @@
                 </a:solidFill>
                 <a:latin typeface="IBM Plex Mono"/>
               </a:rPr>
-              <a:t>./vendor/bin/typo3 extension:setup</a:t>
+              <a:t>./vendor/bin/typo3 upgrade:run pagesRecyclerDoktypeMigration</a:t>
             </a:r>
           </a:p>
           <a:p>
@@ -55279,26 +55279,7 @@
                 </a:solidFill>
                 <a:latin typeface="IBM Plex Mono"/>
               </a:rPr>
-              <a:t>./vendor/bin/typo3 database:updateschema</a:t>
-            </a:r>
-          </a:p>
-          <a:p>
-            <a:pPr algn="l">
-              <a:lnSpc>
-                <a:spcPct val="106000"/>
-              </a:lnSpc>
-              <a:spcBef>
-                <a:spcPts val="0"/>
-              </a:spcBef>
-            </a:pPr>
-            <a:r>
-              <a:rPr sz="950" b="0" i="0">
-                <a:solidFill>
-                  <a:srgbClr val="C9D6E2"/>
-                </a:solidFill>
-                <a:latin typeface="IBM Plex Mono"/>
-              </a:rPr>
-              <a:t>./vendor/bin/typo3 cache:flush</a:t>
+              <a:t>./vendor/bin/typo3 upgrade:run</a:t>
             </a:r>
           </a:p>
         </p:txBody>
@@ -55311,7 +55292,7 @@
         </p:nvSpPr>
         <p:spPr>
           <a:xfrm>
-            <a:off x="566928" y="4297680"/>
+            <a:off x="566928" y="4142232"/>
             <a:ext cx="11057839" cy="914400"/>
           </a:xfrm>
           <a:prstGeom prst="rect">
@@ -55375,6 +55356,34 @@
                 <a:latin typeface="Barlow"/>
               </a:rPr>
               <a:t>That is how the production run stops being the first run.</a:t>
+            </a:r>
+          </a:p>
+          <a:p>
+            <a:pPr algn="l">
+              <a:lnSpc>
+                <a:spcPct val="112000"/>
+              </a:lnSpc>
+              <a:spcBef>
+                <a:spcPts val="700"/>
+              </a:spcBef>
+            </a:pPr>
+            <a:r>
+              <a:rPr sz="1250" b="0" i="0">
+                <a:solidFill>
+                  <a:srgbClr val="FF8700"/>
+                </a:solidFill>
+                <a:latin typeface="Barlow"/>
+              </a:rPr>
+              <a:t>◆  </a:t>
+            </a:r>
+            <a:r>
+              <a:rPr sz="1250" b="0" i="0">
+                <a:solidFill>
+                  <a:srgbClr val="EAF0F6"/>
+                </a:solidFill>
+                <a:latin typeface="Barlow"/>
+              </a:rPr>
+              <a:t>database:updateschema is TYPO3 Console, not core. Drops and renames: Analyze Database Structure.</a:t>
             </a:r>
           </a:p>
         </p:txBody>
